--- a/public/level4/downloads/slides/Level4_Lesson10_Slides.pptx
+++ b/public/level4/downloads/slides/Level4_Lesson10_Slides.pptx
@@ -1041,12 +1041,12 @@
           <a:lstStyle/>
           <a:p>
             <a:r>
-              <a:t>"Hear it, say it" (3 min): Point to the script line. gonna = going to: "I'm gonna unplug my phone charger." Then practice the stress on the small word: turn it OFF, put it aWAY, and the linking: turn_it_off, take_it_out. The class repeats the two lines twice.</a:t>
-            </a:r>
-          </a:p>
-          <a:p>
-            <a:r>
-              <a:t>Reductions: the listening has gonna. Learners need to understand it; they can always say going to.</a:t>
+              <a:t>"Hear it, say it" (3 min): Point to the script line. gonna = going to: "I'm going to unplug my phone charger." Then practice the stress on the small word: turn it OFF, put it aWAY, and the linking: turn_it_off, take_it_out. The class repeats the two lines twice.</a:t>
+            </a:r>
+          </a:p>
+          <a:p>
+            <a:r>
+              <a:t>Reductions: the listening says going to. People often say gonna. Learners only need to recognize it.</a:t>
             </a:r>
           </a:p>
           <a:p>
@@ -1486,7 +1486,7 @@
           </a:p>
           <a:p>
             <a:r>
-              <a:t>No speaker? Read the script with a volunteer at a natural, friendly speed, two times. Say gonna and wanna where the script has them.</a:t>
+              <a:t>No speaker? Read the script with a volunteer at a natural, friendly speed, two times. The script says going to and want to. People often say gonna and wanna; learners only need to recognize those words.</a:t>
             </a:r>
           </a:p>
           <a:p>
@@ -1541,7 +1541,7 @@
           </a:p>
           <a:p>
             <a:r>
-              <a:t>Hana: Good idea. And I'm gonna unplug my phone charger in the morning. It uses electricity all day.</a:t>
+              <a:t>Hana: Good idea. And I'm going to unplug my phone charger in the morning. It uses electricity all day.</a:t>
             </a:r>
           </a:p>
           <a:p>
@@ -16456,6 +16456,17 @@
               <a:buNone/>
             </a:pPr>
             <a:r>
+              <a:rPr lang="en-US" sz="2000" dirty="0" b="1">
+                <a:solidFill>
+                  <a:srgbClr val="5B3FC4"/>
+                </a:solidFill>
+                <a:latin typeface="Lexend Deca" pitchFamily="34" charset="0"/>
+                <a:ea typeface="Lexend Deca" pitchFamily="34" charset="-122"/>
+                <a:cs typeface="Lexend Deca" pitchFamily="34" charset="-120"/>
+              </a:rPr>
+              <a:t>gonna</a:t>
+            </a:r>
+            <a:r>
               <a:rPr lang="en-US" sz="2000" dirty="0">
                 <a:solidFill>
                   <a:srgbClr val="1B2236"/>
@@ -16464,7 +16475,7 @@
                 <a:ea typeface="Lexend Deca" pitchFamily="34" charset="-122"/>
                 <a:cs typeface="Lexend Deca" pitchFamily="34" charset="-120"/>
               </a:rPr>
-              <a:t>You will hear </a:t>
+              <a:t> is a short form. This listening says </a:t>
             </a:r>
             <a:r>
               <a:rPr lang="en-US" sz="2000" dirty="0" b="1">
@@ -16475,7 +16486,7 @@
                 <a:ea typeface="Lexend Deca" pitchFamily="34" charset="-122"/>
                 <a:cs typeface="Lexend Deca" pitchFamily="34" charset="-120"/>
               </a:rPr>
-              <a:t>gonna</a:t>
+              <a:t>going to</a:t>
             </a:r>
             <a:r>
               <a:rPr lang="en-US" sz="2000" dirty="0">
@@ -16641,7 +16652,7 @@
                 <a:ea typeface="Lexend Deca" pitchFamily="34" charset="-122"/>
                 <a:cs typeface="Lexend Deca" pitchFamily="34" charset="-120"/>
               </a:rPr>
-              <a:t>gonna</a:t>
+              <a:t>going to</a:t>
             </a:r>
             <a:r>
               <a:rPr lang="en-US" sz="1800" dirty="0" b="1">

--- a/public/level4/downloads/slides/Level4_Lesson10_Slides.pptx
+++ b/public/level4/downloads/slides/Level4_Lesson10_Slides.pptx
@@ -536,7 +536,7 @@
           </a:p>
           <a:p>
             <a:r>
-              <a:t>Audio: the listening audio for this lesson (about 2:07) is coming soon. It will use computer-generated voices (Chatterbox TTS cloned from synthetic Kokoro-82M reference clips); no recordings of real people. Until it is ready, read the listening script (in the notes of the Before You Listen slide) with a volunteer. The names and the story are invented.</a:t>
+              <a:t>Audio: synthetic voices, computer-generated (Chatterbox TTS cloned from Kokoro-82M reference clips). No recordings of real people. The names and the story are invented.</a:t>
             </a:r>
           </a:p>
           <a:p>
@@ -1481,7 +1481,7 @@
           </a:p>
           <a:p>
             <a:r>
-              <a:t>The audio (about 2:07) is coming soon. When it is ready, it plays the conversation once; press play again for play 2. Until then, read the listening script (at the end of these notes) with a volunteer.</a:t>
+              <a:t>The audio (L4_L10_listening.mp3, about 2:07) plays the conversation once. Press play again for play 2. A third play is fine if the class needs it.</a:t>
             </a:r>
           </a:p>
           <a:p>
@@ -1491,7 +1491,7 @@
           </a:p>
           <a:p>
             <a:r>
-              <a:t>Audio: the listening audio for this lesson (about 2:07) is coming soon. It will use computer-generated voices (Chatterbox TTS cloned from synthetic Kokoro-82M reference clips); no recordings of real people. Until it is ready, read the listening script (in the notes of the Before You Listen slide) with a volunteer. The names and the story are invented.</a:t>
+              <a:t>Audio: synthetic voices, computer-generated (Chatterbox TTS cloned from Kokoro-82M reference clips). No recordings of real people. The names and the story are invented.</a:t>
             </a:r>
           </a:p>
           <a:p>
@@ -1502,121 +1502,6 @@
           <a:p>
             <a:r>
               <a:t>Picture: Twemoji graphics by Twitter, Inc. and other contributors (https://github.com/jdecked/twemoji), CC BY 4.0 (https://creativecommons.org/licenses/by/4.0/); resized and combined, with signs and labels (images/CREDITS.md).</a:t>
-            </a:r>
-          </a:p>
-          <a:p>
-            <a:r>
-              <a:t>Listening script (the audio is coming soon; until then, read it aloud with a volunteer at a normal, friendly speed):</a:t>
-            </a:r>
-          </a:p>
-          <a:p>
-            <a:r>
-              <a:t>Narrator: Lesson ten. Two roommates, Sofia and Hana, look at their electric bill. Then Sofia calls the electric company.</a:t>
-            </a:r>
-          </a:p>
-          <a:p>
-            <a:r>
-              <a:t>Sofia: Hana, look at this. Our electric bill is one hundred and forty-two dollars this month!</a:t>
-            </a:r>
-          </a:p>
-          <a:p>
-            <a:r>
-              <a:t>Hana: What? Last month it was ninety dollars. Why is it so high?</a:t>
-            </a:r>
-          </a:p>
-          <a:p>
-            <a:r>
-              <a:t>Sofia: Well, we use too much electricity. The heat is on all day, and the lights are on in empty rooms.</a:t>
-            </a:r>
-          </a:p>
-          <a:p>
-            <a:r>
-              <a:t>Hana: You're right. I always forget to turn them off. Oh, the TV is on now, and nobody is watching. I'll turn it off.</a:t>
-            </a:r>
-          </a:p>
-          <a:p>
-            <a:r>
-              <a:t>Sofia: OK, let's make a plan. First, we can turn down the heat at night. Sixty-eight degrees is fine.</a:t>
-            </a:r>
-          </a:p>
-          <a:p>
-            <a:r>
-              <a:t>Hana: Good idea. And I'm going to unplug my phone charger in the morning. It uses electricity all day.</a:t>
-            </a:r>
-          </a:p>
-          <a:p>
-            <a:r>
-              <a:t>Sofia: Also, let's put on sweaters and not turn up the heat. Can you call the electric company? I have class.</a:t>
-            </a:r>
-          </a:p>
-          <a:p>
-            <a:r>
-              <a:t>Hana: Sorry, I have work. Can you call them tonight?</a:t>
-            </a:r>
-          </a:p>
-          <a:p>
-            <a:r>
-              <a:t>Sofia: Sure. I'll call them now.</a:t>
-            </a:r>
-          </a:p>
-          <a:p>
-            <a:r>
-              <a:t>Paul: Thank you for calling City Power. This is Paul. How can I help you?</a:t>
-            </a:r>
-          </a:p>
-          <a:p>
-            <a:r>
-              <a:t>Sofia: Hi. I'm calling about my bill. When is it due?</a:t>
-            </a:r>
-          </a:p>
-          <a:p>
-            <a:r>
-              <a:t>Paul: Can I have your account number, please?</a:t>
-            </a:r>
-          </a:p>
-          <a:p>
-            <a:r>
-              <a:t>Sofia: Yes. It's four, seven, two, one, nine.</a:t>
-            </a:r>
-          </a:p>
-          <a:p>
-            <a:r>
-              <a:t>Paul: Thank you. Your bill is due on March fifteenth.</a:t>
-            </a:r>
-          </a:p>
-          <a:p>
-            <a:r>
-              <a:t>Sofia: OK. Also, do you have any programs to help us save energy?</a:t>
-            </a:r>
-          </a:p>
-          <a:p>
-            <a:r>
-              <a:t>Paul: Yes. We have a free home energy check. Someone visits your apartment and gives you tips. And you can get free light bulbs.</a:t>
-            </a:r>
-          </a:p>
-          <a:p>
-            <a:r>
-              <a:t>Sofia: That sounds great. Can I sign up?</a:t>
-            </a:r>
-          </a:p>
-          <a:p>
-            <a:r>
-              <a:t>Paul: Sure. Is next Tuesday morning OK?</a:t>
-            </a:r>
-          </a:p>
-          <a:p>
-            <a:r>
-              <a:t>Sofia: Yes, that's perfect. Thank you.</a:t>
-            </a:r>
-          </a:p>
-          <a:p>
-            <a:r>
-              <a:t>Paul: You're welcome. And don't forget to turn off the lights when you leave a room!</a:t>
-            </a:r>
-          </a:p>
-          <a:p>
-            <a:r>
-              <a:t>Narrator: That's the end of the listening.</a:t>
             </a:r>
           </a:p>
         </p:txBody>
@@ -12106,7 +11991,7 @@
                 <a:ea typeface="Lexend Deca" pitchFamily="34" charset="-122"/>
                 <a:cs typeface="Lexend Deca" pitchFamily="34" charset="-120"/>
               </a:rPr>
-              <a:t>Audio (about 2:07): coming soon.</a:t>
+              <a:t>Audio: about 2:07. It plays once.</a:t>
             </a:r>
             <a:endParaRPr lang="en-US" sz="2200" dirty="0"/>
           </a:p>
@@ -31048,7 +30933,7 @@
                 <a:ea typeface="Lexend Deca" pitchFamily="34" charset="-122"/>
                 <a:cs typeface="Lexend Deca" pitchFamily="34" charset="-120"/>
               </a:rPr>
-              <a:t>Audio (coming soon): synthetic voices made with Chatterbox TTS (MIT License), cloned from short synthetic reference clips made with Kokoro-82M (Apache License 2.0). No recordings of real people. Each file will carry an inaudible Perth watermark marking it as AI-generated. Font: Lexend Deca (OFL 1.1).</a:t>
+              <a:t>Audio: synthetic voices made with Chatterbox TTS (MIT License), cloned from short synthetic reference clips made with Kokoro-82M (Apache License 2.0). No recordings of real people were used. Each file carries an inaudible Perth watermark marking it as AI-generated. Font: Lexend Deca (OFL 1.1).</a:t>
             </a:r>
             <a:endParaRPr lang="en-US" sz="1350" dirty="0" b="0"/>
           </a:p>

--- a/public/level4/downloads/slides/Level4_Lesson10_Slides.pptx
+++ b/public/level4/downloads/slides/Level4_Lesson10_Slides.pptx
@@ -1047,6 +1047,11 @@
           <a:p>
             <a:r>
               <a:t>Reductions: the listening says going to. People often say gonna. Learners only need to recognize it.</a:t>
+            </a:r>
+          </a:p>
+          <a:p>
+            <a:r>
+              <a:t>Everyday English: people often say gonna (going to) and wanna (want to). Learners will hear them often. They are fine in casual talk; in writing, at a job interview, or in a formal email, use going to and want to. The listening uses the full forms.</a:t>
             </a:r>
           </a:p>
           <a:p>
@@ -16360,7 +16365,7 @@
                 <a:ea typeface="Lexend Deca" pitchFamily="34" charset="-122"/>
                 <a:cs typeface="Lexend Deca" pitchFamily="34" charset="-120"/>
               </a:rPr>
-              <a:t> is a short form. This listening says </a:t>
+              <a:t> = going to, </a:t>
             </a:r>
             <a:r>
               <a:rPr lang="en-US" sz="2000" dirty="0" b="1">
@@ -16371,7 +16376,7 @@
                 <a:ea typeface="Lexend Deca" pitchFamily="34" charset="-122"/>
                 <a:cs typeface="Lexend Deca" pitchFamily="34" charset="-120"/>
               </a:rPr>
-              <a:t>going to</a:t>
+              <a:t>wanna</a:t>
             </a:r>
             <a:r>
               <a:rPr lang="en-US" sz="2000" dirty="0">
@@ -16382,7 +16387,7 @@
                 <a:ea typeface="Lexend Deca" pitchFamily="34" charset="-122"/>
                 <a:cs typeface="Lexend Deca" pitchFamily="34" charset="-120"/>
               </a:rPr>
-              <a:t>.</a:t>
+              <a:t> = want to: fine in everyday talk.</a:t>
             </a:r>
             <a:endParaRPr lang="en-US" sz="2000" dirty="0"/>
           </a:p>
